--- a/exports/pptx/lessons/middle-module-09-subtraction-nikhilam/day-07-twos-complement.pptx
+++ b/exports/pptx/lessons/middle-module-09-subtraction-nikhilam/day-07-twos-complement.pptx
@@ -7290,7 +7290,7 @@
         </p:nvSpPr>
         <p:spPr>
           <a:xfrm>
-            <a:off x="406301" y="2626668"/>
+            <a:off x="406301" y="1160413"/>
             <a:ext cx="8498026" cy="213271"/>
           </a:xfrm>
           <a:prstGeom prst="rect">
@@ -7316,6 +7316,252 @@
               <a:buNone/>
             </a:pPr>
             <a:r>
+              <a:rPr lang="en-US" sz="1200" i="1" dirty="0">
+                <a:solidFill>
+                  <a:srgbClr val="1C2833"/>
+                </a:solidFill>
+                <a:latin typeface="Arial" pitchFamily="34" charset="0"/>
+                <a:ea typeface="Arial" pitchFamily="34" charset="-122"/>
+                <a:cs typeface="Arial" pitchFamily="34" charset="-120"/>
+              </a:rPr>
+              <a:t>Each row: Problem · A · B · Flip A or B? · Two's-comp · Add · Discard top bit · Answer.</a:t>
+            </a:r>
+            <a:endParaRPr lang="en-US" sz="1200" dirty="0"/>
+          </a:p>
+        </p:txBody>
+      </p:sp>
+      <p:sp>
+        <p:nvSpPr>
+          <p:cNvPr id="6" name="Text 4"/>
+          <p:cNvSpPr/>
+          <p:nvPr/>
+        </p:nvSpPr>
+        <p:spPr>
+          <a:xfrm>
+            <a:off x="634901" y="1462534"/>
+            <a:ext cx="8102798" cy="1013222"/>
+          </a:xfrm>
+          <a:prstGeom prst="rect">
+            <a:avLst/>
+          </a:prstGeom>
+          <a:noFill/>
+          <a:ln/>
+        </p:spPr>
+        <p:txBody>
+          <a:bodyPr wrap="square" lIns="0" tIns="0" rIns="0" bIns="0" rtlCol="0" anchor="t"/>
+          <a:lstStyle/>
+          <a:p>
+            <a:pPr algn="l" marL="342900" indent="-342900">
+              <a:lnSpc>
+                <a:spcPts val="1620"/>
+              </a:lnSpc>
+              <a:spcAft>
+                <a:spcPts val="300"/>
+              </a:spcAft>
+              <a:buSzPct val="100000"/>
+              <a:buChar char="•"/>
+            </a:pPr>
+            <a:r>
+              <a:rPr lang="en-US" sz="1200" b="1" dirty="0">
+                <a:solidFill>
+                  <a:srgbClr val="1C2833"/>
+                </a:solidFill>
+                <a:latin typeface="Arial" pitchFamily="34" charset="0"/>
+                <a:ea typeface="Arial" pitchFamily="34" charset="-122"/>
+                <a:cs typeface="Arial" pitchFamily="34" charset="-120"/>
+              </a:rPr>
+              <a:t>6 − 4</a:t>
+            </a:r>
+            <a:pPr algn="l" indent="0" marL="0">
+              <a:lnSpc>
+                <a:spcPts val="1620"/>
+              </a:lnSpc>
+              <a:spcAft>
+                <a:spcPts val="300"/>
+              </a:spcAft>
+              <a:buNone/>
+            </a:pPr>
+            <a:r>
+              <a:rPr lang="en-US" sz="1200" dirty="0">
+                <a:solidFill>
+                  <a:srgbClr val="1C2833"/>
+                </a:solidFill>
+                <a:latin typeface="Arial" pitchFamily="34" charset="0"/>
+                <a:ea typeface="Arial" pitchFamily="34" charset="-122"/>
+                <a:cs typeface="Arial" pitchFamily="34" charset="-120"/>
+              </a:rPr>
+              <a:t> — 0110 · 0100 · Flip B · 1100 · 1 0010 · drop top → 0010 · 2 ✓</a:t>
+            </a:r>
+            <a:endParaRPr lang="en-US" sz="1200" dirty="0"/>
+          </a:p>
+          <a:p>
+            <a:pPr algn="l" marL="342900" indent="-342900">
+              <a:lnSpc>
+                <a:spcPts val="1620"/>
+              </a:lnSpc>
+              <a:spcAft>
+                <a:spcPts val="300"/>
+              </a:spcAft>
+              <a:buSzPct val="100000"/>
+              <a:buChar char="•"/>
+            </a:pPr>
+            <a:r>
+              <a:rPr lang="en-US" sz="1200" b="1" dirty="0">
+                <a:solidFill>
+                  <a:srgbClr val="1C2833"/>
+                </a:solidFill>
+                <a:latin typeface="Arial" pitchFamily="34" charset="0"/>
+                <a:ea typeface="Arial" pitchFamily="34" charset="-122"/>
+                <a:cs typeface="Arial" pitchFamily="34" charset="-120"/>
+              </a:rPr>
+              <a:t>7 − 5</a:t>
+            </a:r>
+            <a:pPr algn="l" indent="0" marL="0">
+              <a:lnSpc>
+                <a:spcPts val="1620"/>
+              </a:lnSpc>
+              <a:spcAft>
+                <a:spcPts val="300"/>
+              </a:spcAft>
+              <a:buNone/>
+            </a:pPr>
+            <a:r>
+              <a:rPr lang="en-US" sz="1200" dirty="0">
+                <a:solidFill>
+                  <a:srgbClr val="1C2833"/>
+                </a:solidFill>
+                <a:latin typeface="Arial" pitchFamily="34" charset="0"/>
+                <a:ea typeface="Arial" pitchFamily="34" charset="-122"/>
+                <a:cs typeface="Arial" pitchFamily="34" charset="-120"/>
+              </a:rPr>
+              <a:t> — 0111 · 0101 · Flip B · 1011 · 1 0010 · drop top → 0010 · 2 ✓</a:t>
+            </a:r>
+            <a:endParaRPr lang="en-US" sz="1200" dirty="0"/>
+          </a:p>
+          <a:p>
+            <a:pPr algn="l" marL="342900" indent="-342900">
+              <a:lnSpc>
+                <a:spcPts val="1620"/>
+              </a:lnSpc>
+              <a:spcAft>
+                <a:spcPts val="300"/>
+              </a:spcAft>
+              <a:buSzPct val="100000"/>
+              <a:buChar char="•"/>
+            </a:pPr>
+            <a:r>
+              <a:rPr lang="en-US" sz="1200" b="1" dirty="0">
+                <a:solidFill>
+                  <a:srgbClr val="1C2833"/>
+                </a:solidFill>
+                <a:latin typeface="Arial" pitchFamily="34" charset="0"/>
+                <a:ea typeface="Arial" pitchFamily="34" charset="-122"/>
+                <a:cs typeface="Arial" pitchFamily="34" charset="-120"/>
+              </a:rPr>
+              <a:t>9 − 2</a:t>
+            </a:r>
+            <a:pPr algn="l" indent="0" marL="0">
+              <a:lnSpc>
+                <a:spcPts val="1620"/>
+              </a:lnSpc>
+              <a:spcAft>
+                <a:spcPts val="300"/>
+              </a:spcAft>
+              <a:buNone/>
+            </a:pPr>
+            <a:r>
+              <a:rPr lang="en-US" sz="1200" dirty="0">
+                <a:solidFill>
+                  <a:srgbClr val="1C2833"/>
+                </a:solidFill>
+                <a:latin typeface="Arial" pitchFamily="34" charset="0"/>
+                <a:ea typeface="Arial" pitchFamily="34" charset="-122"/>
+                <a:cs typeface="Arial" pitchFamily="34" charset="-120"/>
+              </a:rPr>
+              <a:t> — 1001 · 0010 · Flip B · 1110 · 1 0111 · drop top → 0111 · 7 ✓</a:t>
+            </a:r>
+            <a:endParaRPr lang="en-US" sz="1200" dirty="0"/>
+          </a:p>
+          <a:p>
+            <a:pPr algn="l" marL="342900" indent="-342900">
+              <a:lnSpc>
+                <a:spcPts val="1620"/>
+              </a:lnSpc>
+              <a:spcAft>
+                <a:spcPts val="300"/>
+              </a:spcAft>
+              <a:buSzPct val="100000"/>
+              <a:buChar char="•"/>
+            </a:pPr>
+            <a:r>
+              <a:rPr lang="en-US" sz="1200" b="1" dirty="0">
+                <a:solidFill>
+                  <a:srgbClr val="1C2833"/>
+                </a:solidFill>
+                <a:latin typeface="Arial" pitchFamily="34" charset="0"/>
+                <a:ea typeface="Arial" pitchFamily="34" charset="-122"/>
+                <a:cs typeface="Arial" pitchFamily="34" charset="-120"/>
+              </a:rPr>
+              <a:t>12 − 7</a:t>
+            </a:r>
+            <a:pPr algn="l" indent="0" marL="0">
+              <a:lnSpc>
+                <a:spcPts val="1620"/>
+              </a:lnSpc>
+              <a:spcAft>
+                <a:spcPts val="300"/>
+              </a:spcAft>
+              <a:buNone/>
+            </a:pPr>
+            <a:r>
+              <a:rPr lang="en-US" sz="1200" dirty="0">
+                <a:solidFill>
+                  <a:srgbClr val="1C2833"/>
+                </a:solidFill>
+                <a:latin typeface="Arial" pitchFamily="34" charset="0"/>
+                <a:ea typeface="Arial" pitchFamily="34" charset="-122"/>
+                <a:cs typeface="Arial" pitchFamily="34" charset="-120"/>
+              </a:rPr>
+              <a:t> — 1100 · 0111 · Flip B · 1001 · 1 0101 · drop top → 0101 · 5 ✓</a:t>
+            </a:r>
+            <a:endParaRPr lang="en-US" sz="1200" dirty="0"/>
+          </a:p>
+        </p:txBody>
+      </p:sp>
+      <p:sp>
+        <p:nvSpPr>
+          <p:cNvPr id="7" name="Text 5"/>
+          <p:cNvSpPr/>
+          <p:nvPr/>
+        </p:nvSpPr>
+        <p:spPr>
+          <a:xfrm>
+            <a:off x="406301" y="2564606"/>
+            <a:ext cx="8498026" cy="213271"/>
+          </a:xfrm>
+          <a:prstGeom prst="rect">
+            <a:avLst/>
+          </a:prstGeom>
+          <a:noFill/>
+          <a:ln/>
+        </p:spPr>
+        <p:txBody>
+          <a:bodyPr wrap="square" lIns="0" tIns="0" rIns="0" bIns="0" rtlCol="0" anchor="t"/>
+          <a:lstStyle/>
+          <a:p>
+            <a:pPr algn="l" indent="0" marL="0">
+              <a:lnSpc>
+                <a:spcPts val="1680"/>
+              </a:lnSpc>
+              <a:spcBef>
+                <a:spcPts val="300"/>
+              </a:spcBef>
+              <a:spcAft>
+                <a:spcPts val="300"/>
+              </a:spcAft>
+              <a:buNone/>
+            </a:pPr>
+            <a:r>
               <a:rPr lang="en-US" sz="1200" dirty="0">
                 <a:solidFill>
                   <a:srgbClr val="1C2833"/>
@@ -7332,7 +7578,7 @@
       </p:sp>
       <p:sp>
         <p:nvSpPr>
-          <p:cNvPr id="6" name="Text 4"/>
+          <p:cNvPr id="8" name="Text 6"/>
           <p:cNvSpPr/>
           <p:nvPr/>
         </p:nvSpPr>
